--- a/media/resources/files/EkiOrunduuOnduktar_Koboytuu_JoopTorchosu.pptx
+++ b/media/resources/files/EkiOrunduuOnduktar_Koboytuu_JoopTorchosu.pptx
@@ -23348,7 +23348,7 @@
             </a:pPr>
             <a:r>
               <a:rPr lang="ru-RU" sz="2400" dirty="0"/>
-              <a:t>Турдуу пикирлер учун ыраазычылык билдиребиз.</a:t>
+              <a:t>Түрдүү пикирлер үчүн ыраазычылык билдиребиз.</a:t>
             </a:r>
           </a:p>
           <a:p>

--- a/media/resources/files/EkiOrunduuOnduktar_Koboytuu_JoopTorchosu.pptx
+++ b/media/resources/files/EkiOrunduuOnduktar_Koboytuu_JoopTorchosu.pptx
@@ -7592,7 +7592,7 @@
                           <a:ea typeface="+mn-ea"/>
                           <a:cs typeface="+mn-cs"/>
                         </a:rPr>
-                        <a:t>2.928</a:t>
+                        <a:t>2,928</a:t>
                       </a:r>
                     </a:p>
                   </a:txBody>
@@ -7675,7 +7675,7 @@
                           <a:ea typeface="+mn-ea"/>
                           <a:cs typeface="+mn-cs"/>
                         </a:rPr>
-                        <a:t>22.94</a:t>
+                        <a:t>22,94</a:t>
                       </a:r>
                     </a:p>
                   </a:txBody>
@@ -7758,7 +7758,7 @@
                           <a:ea typeface="+mn-ea"/>
                           <a:cs typeface="+mn-cs"/>
                         </a:rPr>
-                        <a:t>0.648</a:t>
+                        <a:t>0,648</a:t>
                       </a:r>
                     </a:p>
                   </a:txBody>
@@ -7841,7 +7841,7 @@
                           <a:ea typeface="+mn-ea"/>
                           <a:cs typeface="+mn-cs"/>
                         </a:rPr>
-                        <a:t>3.12</a:t>
+                        <a:t>3,12</a:t>
                       </a:r>
                     </a:p>
                   </a:txBody>
@@ -7924,7 +7924,7 @@
                           <a:ea typeface="+mn-ea"/>
                           <a:cs typeface="+mn-cs"/>
                         </a:rPr>
-                        <a:t>5.8</a:t>
+                        <a:t>5,8</a:t>
                       </a:r>
                     </a:p>
                   </a:txBody>
@@ -8014,7 +8014,7 @@
                           <a:ea typeface="+mn-ea"/>
                           <a:cs typeface="+mn-cs"/>
                         </a:rPr>
-                        <a:t>4.4</a:t>
+                        <a:t>4,4</a:t>
                       </a:r>
                     </a:p>
                   </a:txBody>
@@ -8097,7 +8097,7 @@
                           <a:ea typeface="+mn-ea"/>
                           <a:cs typeface="+mn-cs"/>
                         </a:rPr>
-                        <a:t>0.728</a:t>
+                        <a:t>0,728</a:t>
                       </a:r>
                     </a:p>
                   </a:txBody>
@@ -8180,7 +8180,7 @@
                           <a:ea typeface="+mn-ea"/>
                           <a:cs typeface="+mn-cs"/>
                         </a:rPr>
-                        <a:t>1.65</a:t>
+                        <a:t>1,65</a:t>
                       </a:r>
                     </a:p>
                   </a:txBody>
@@ -8263,7 +8263,7 @@
                           <a:ea typeface="+mn-ea"/>
                           <a:cs typeface="+mn-cs"/>
                         </a:rPr>
-                        <a:t>0.112</a:t>
+                        <a:t>0,112</a:t>
                       </a:r>
                     </a:p>
                   </a:txBody>
@@ -8346,7 +8346,7 @@
                           <a:ea typeface="+mn-ea"/>
                           <a:cs typeface="+mn-cs"/>
                         </a:rPr>
-                        <a:t>3.66</a:t>
+                        <a:t>3,66</a:t>
                       </a:r>
                     </a:p>
                   </a:txBody>
@@ -8436,7 +8436,7 @@
                           <a:ea typeface="+mn-ea"/>
                           <a:cs typeface="+mn-cs"/>
                         </a:rPr>
-                        <a:t>1.302</a:t>
+                        <a:t>1,302</a:t>
                       </a:r>
                     </a:p>
                   </a:txBody>
@@ -8519,7 +8519,7 @@
                           <a:ea typeface="+mn-ea"/>
                           <a:cs typeface="+mn-cs"/>
                         </a:rPr>
-                        <a:t>6.72</a:t>
+                        <a:t>6,72</a:t>
                       </a:r>
                     </a:p>
                   </a:txBody>
@@ -8602,7 +8602,7 @@
                           <a:ea typeface="+mn-ea"/>
                           <a:cs typeface="+mn-cs"/>
                         </a:rPr>
-                        <a:t>1.56</a:t>
+                        <a:t>1,56</a:t>
                       </a:r>
                     </a:p>
                   </a:txBody>
@@ -8685,7 +8685,7 @@
                           <a:ea typeface="+mn-ea"/>
                           <a:cs typeface="+mn-cs"/>
                         </a:rPr>
-                        <a:t>1.575</a:t>
+                        <a:t>1,575</a:t>
                       </a:r>
                     </a:p>
                   </a:txBody>
@@ -8768,7 +8768,7 @@
                           <a:ea typeface="+mn-ea"/>
                           <a:cs typeface="+mn-cs"/>
                         </a:rPr>
-                        <a:t>1.653</a:t>
+                        <a:t>1,653</a:t>
                       </a:r>
                     </a:p>
                   </a:txBody>
@@ -8858,7 +8858,7 @@
                           <a:ea typeface="+mn-ea"/>
                           <a:cs typeface="+mn-cs"/>
                         </a:rPr>
-                        <a:t>0.68</a:t>
+                        <a:t>0,68</a:t>
                       </a:r>
                     </a:p>
                   </a:txBody>
@@ -8941,7 +8941,7 @@
                           <a:ea typeface="+mn-ea"/>
                           <a:cs typeface="+mn-cs"/>
                         </a:rPr>
-                        <a:t>3.08</a:t>
+                        <a:t>3,08</a:t>
                       </a:r>
                     </a:p>
                   </a:txBody>
@@ -9024,7 +9024,7 @@
                           <a:ea typeface="+mn-ea"/>
                           <a:cs typeface="+mn-cs"/>
                         </a:rPr>
-                        <a:t>6.63</a:t>
+                        <a:t>6,63</a:t>
                       </a:r>
                     </a:p>
                   </a:txBody>
@@ -9107,7 +9107,7 @@
                           <a:ea typeface="+mn-ea"/>
                           <a:cs typeface="+mn-cs"/>
                         </a:rPr>
-                        <a:t>2.72</a:t>
+                        <a:t>2,72</a:t>
                       </a:r>
                     </a:p>
                   </a:txBody>
@@ -9190,7 +9190,7 @@
                           <a:ea typeface="+mn-ea"/>
                           <a:cs typeface="+mn-cs"/>
                         </a:rPr>
-                        <a:t>5.25</a:t>
+                        <a:t>5,25</a:t>
                       </a:r>
                     </a:p>
                   </a:txBody>
@@ -9280,7 +9280,7 @@
                           <a:ea typeface="+mn-ea"/>
                           <a:cs typeface="+mn-cs"/>
                         </a:rPr>
-                        <a:t>0.296</a:t>
+                        <a:t>0,296</a:t>
                       </a:r>
                     </a:p>
                   </a:txBody>
@@ -9363,7 +9363,7 @@
                           <a:ea typeface="+mn-ea"/>
                           <a:cs typeface="+mn-cs"/>
                         </a:rPr>
-                        <a:t>0.58</a:t>
+                        <a:t>0,58</a:t>
                       </a:r>
                     </a:p>
                   </a:txBody>
@@ -9446,7 +9446,7 @@
                           <a:ea typeface="+mn-ea"/>
                           <a:cs typeface="+mn-cs"/>
                         </a:rPr>
-                        <a:t>0.235</a:t>
+                        <a:t>0,235</a:t>
                       </a:r>
                     </a:p>
                   </a:txBody>
@@ -9529,7 +9529,7 @@
                           <a:ea typeface="+mn-ea"/>
                           <a:cs typeface="+mn-cs"/>
                         </a:rPr>
-                        <a:t>10.25</a:t>
+                        <a:t>10,25</a:t>
                       </a:r>
                     </a:p>
                   </a:txBody>
@@ -9612,7 +9612,7 @@
                           <a:ea typeface="+mn-ea"/>
                           <a:cs typeface="+mn-cs"/>
                         </a:rPr>
-                        <a:t>0.2016</a:t>
+                        <a:t>0,2016</a:t>
                       </a:r>
                     </a:p>
                   </a:txBody>
@@ -9743,7 +9743,7 @@
                           </a:solidFill>
                           <a:latin typeface="Bahnschrift" panose="020B0502040204020203" pitchFamily="34" charset="0"/>
                         </a:rPr>
-                        <a:t>0.52 × 1.4</a:t>
+                        <a:t>0,52 × 1,4</a:t>
                       </a:r>
                     </a:p>
                   </a:txBody>
@@ -9810,7 +9810,7 @@
                           </a:solidFill>
                           <a:latin typeface="Bahnschrift" panose="020B0502040204020203" pitchFamily="34" charset="0"/>
                         </a:rPr>
-                        <a:t>2.5 × 4.1</a:t>
+                        <a:t>2,5 × 4,1</a:t>
                       </a:r>
                     </a:p>
                   </a:txBody>
@@ -9877,7 +9877,7 @@
                           </a:solidFill>
                           <a:latin typeface="Bahnschrift" panose="020B0502040204020203" pitchFamily="34" charset="0"/>
                         </a:rPr>
-                        <a:t>14.5 × 0.4</a:t>
+                        <a:t>14,5 × 0,4</a:t>
                       </a:r>
                     </a:p>
                   </a:txBody>
@@ -9944,7 +9944,7 @@
                           </a:solidFill>
                           <a:latin typeface="Bahnschrift" panose="020B0502040204020203" pitchFamily="34" charset="0"/>
                         </a:rPr>
-                        <a:t>0.37 × 0.8</a:t>
+                        <a:t>0,37 × 0,8</a:t>
                       </a:r>
                     </a:p>
                   </a:txBody>
@@ -10011,7 +10011,7 @@
                           </a:solidFill>
                           <a:latin typeface="Bahnschrift" panose="020B0502040204020203" pitchFamily="34" charset="0"/>
                         </a:rPr>
-                        <a:t>15.6 × 0.1</a:t>
+                        <a:t>15,6 × 0,1</a:t>
                       </a:r>
                     </a:p>
                   </a:txBody>
@@ -10085,7 +10085,7 @@
                           </a:solidFill>
                           <a:latin typeface="Bahnschrift" panose="020B0502040204020203" pitchFamily="34" charset="0"/>
                         </a:rPr>
-                        <a:t>12.2 × 0.3</a:t>
+                        <a:t>12,2 × 0,3</a:t>
                       </a:r>
                     </a:p>
                   </a:txBody>
@@ -10152,7 +10152,7 @@
                           </a:solidFill>
                           <a:latin typeface="Bahnschrift" panose="020B0502040204020203" pitchFamily="34" charset="0"/>
                         </a:rPr>
-                        <a:t>0.8 × 0.81</a:t>
+                        <a:t>0,8 × 0,81</a:t>
                       </a:r>
                     </a:p>
                   </a:txBody>
@@ -10219,7 +10219,7 @@
                           </a:solidFill>
                           <a:latin typeface="Bahnschrift" panose="020B0502040204020203" pitchFamily="34" charset="0"/>
                         </a:rPr>
-                        <a:t>1.4 × 2.2</a:t>
+                        <a:t>1,4 × 2,2</a:t>
                       </a:r>
                     </a:p>
                   </a:txBody>
@@ -10286,7 +10286,7 @@
                           </a:solidFill>
                           <a:latin typeface="Bahnschrift" panose="020B0502040204020203" pitchFamily="34" charset="0"/>
                         </a:rPr>
-                        <a:t>13.6 × 0.2</a:t>
+                        <a:t>13,6 × 0,2</a:t>
                       </a:r>
                     </a:p>
                   </a:txBody>
@@ -10353,7 +10353,7 @@
                           </a:solidFill>
                           <a:latin typeface="Bahnschrift" panose="020B0502040204020203" pitchFamily="34" charset="0"/>
                         </a:rPr>
-                        <a:t>0.62 × 2.1</a:t>
+                        <a:t>0,62 × 2,1</a:t>
                       </a:r>
                     </a:p>
                   </a:txBody>
@@ -10427,7 +10427,7 @@
                           </a:solidFill>
                           <a:latin typeface="Bahnschrift" panose="020B0502040204020203" pitchFamily="34" charset="0"/>
                         </a:rPr>
-                        <a:t>0.16 × 0.7</a:t>
+                        <a:t>0,16 × 0,7</a:t>
                       </a:r>
                     </a:p>
                   </a:txBody>
@@ -10494,7 +10494,7 @@
                           </a:solidFill>
                           <a:latin typeface="Bahnschrift" panose="020B0502040204020203" pitchFamily="34" charset="0"/>
                         </a:rPr>
-                        <a:t>0.61 × 4.8</a:t>
+                        <a:t>0,61 × 4,8</a:t>
                       </a:r>
                     </a:p>
                   </a:txBody>
@@ -10561,7 +10561,7 @@
                           </a:solidFill>
                           <a:latin typeface="Bahnschrift" panose="020B0502040204020203" pitchFamily="34" charset="0"/>
                         </a:rPr>
-                        <a:t>0.5 × 0.47</a:t>
+                        <a:t>0,5 × 0,47</a:t>
                       </a:r>
                     </a:p>
                   </a:txBody>
@@ -10628,7 +10628,7 @@
                           </a:solidFill>
                           <a:latin typeface="Bahnschrift" panose="020B0502040204020203" pitchFamily="34" charset="0"/>
                         </a:rPr>
-                        <a:t>0.87 × 1.9</a:t>
+                        <a:t>0,87 × 1,9</a:t>
                       </a:r>
                     </a:p>
                   </a:txBody>
@@ -10695,7 +10695,7 @@
                           </a:solidFill>
                           <a:latin typeface="Bahnschrift" panose="020B0502040204020203" pitchFamily="34" charset="0"/>
                         </a:rPr>
-                        <a:t>5.1 × 1.3</a:t>
+                        <a:t>5,1 × 1,3</a:t>
                       </a:r>
                     </a:p>
                   </a:txBody>
@@ -10769,7 +10769,7 @@
                           </a:solidFill>
                           <a:latin typeface="Bahnschrift" panose="020B0502040204020203" pitchFamily="34" charset="0"/>
                         </a:rPr>
-                        <a:t>10.5 × 0.5</a:t>
+                        <a:t>10,5 × 0,5</a:t>
                       </a:r>
                     </a:p>
                   </a:txBody>
@@ -10836,7 +10836,7 @@
                           </a:solidFill>
                           <a:latin typeface="Bahnschrift" panose="020B0502040204020203" pitchFamily="34" charset="0"/>
                         </a:rPr>
-                        <a:t>6.2 × 3.7</a:t>
+                        <a:t>6,2 × 3,7</a:t>
                       </a:r>
                     </a:p>
                   </a:txBody>
@@ -10903,7 +10903,7 @@
                           </a:solidFill>
                           <a:latin typeface="Bahnschrift" panose="020B0502040204020203" pitchFamily="34" charset="0"/>
                         </a:rPr>
-                        <a:t>0.45 × 3.5</a:t>
+                        <a:t>0,45 × 3,5</a:t>
                       </a:r>
                     </a:p>
                   </a:txBody>
@@ -10970,7 +10970,7 @@
                           </a:solidFill>
                           <a:latin typeface="Bahnschrift" panose="020B0502040204020203" pitchFamily="34" charset="0"/>
                         </a:rPr>
-                        <a:t>2.4 × 2.8</a:t>
+                        <a:t>2,4 × 2,8</a:t>
                       </a:r>
                     </a:p>
                   </a:txBody>
@@ -11037,7 +11037,7 @@
                           </a:solidFill>
                           <a:latin typeface="Bahnschrift" panose="020B0502040204020203" pitchFamily="34" charset="0"/>
                         </a:rPr>
-                        <a:t>0.96 × 0.21</a:t>
+                        <a:t>0,96 × 0,21</a:t>
                       </a:r>
                     </a:p>
                   </a:txBody>
@@ -11499,7 +11499,7 @@
                           <a:ea typeface="+mn-ea"/>
                           <a:cs typeface="+mn-cs"/>
                         </a:rPr>
-                        <a:t>2.928</a:t>
+                        <a:t>2,928</a:t>
                       </a:r>
                     </a:p>
                   </a:txBody>
@@ -11582,7 +11582,7 @@
                           <a:ea typeface="+mn-ea"/>
                           <a:cs typeface="+mn-cs"/>
                         </a:rPr>
-                        <a:t>22.94</a:t>
+                        <a:t>22,94</a:t>
                       </a:r>
                     </a:p>
                   </a:txBody>
@@ -11665,7 +11665,7 @@
                           <a:ea typeface="+mn-ea"/>
                           <a:cs typeface="+mn-cs"/>
                         </a:rPr>
-                        <a:t>0.648</a:t>
+                        <a:t>0,648</a:t>
                       </a:r>
                     </a:p>
                   </a:txBody>
@@ -11748,7 +11748,7 @@
                           <a:ea typeface="+mn-ea"/>
                           <a:cs typeface="+mn-cs"/>
                         </a:rPr>
-                        <a:t>3.12</a:t>
+                        <a:t>3,12</a:t>
                       </a:r>
                     </a:p>
                   </a:txBody>
@@ -11831,7 +11831,7 @@
                           <a:ea typeface="+mn-ea"/>
                           <a:cs typeface="+mn-cs"/>
                         </a:rPr>
-                        <a:t>5.8</a:t>
+                        <a:t>5,8</a:t>
                       </a:r>
                     </a:p>
                   </a:txBody>
@@ -11921,7 +11921,7 @@
                           <a:ea typeface="+mn-ea"/>
                           <a:cs typeface="+mn-cs"/>
                         </a:rPr>
-                        <a:t>4.4</a:t>
+                        <a:t>4,4</a:t>
                       </a:r>
                     </a:p>
                   </a:txBody>
@@ -12004,7 +12004,7 @@
                           <a:ea typeface="+mn-ea"/>
                           <a:cs typeface="+mn-cs"/>
                         </a:rPr>
-                        <a:t>0.728</a:t>
+                        <a:t>0,728</a:t>
                       </a:r>
                     </a:p>
                   </a:txBody>
@@ -12087,7 +12087,7 @@
                           <a:ea typeface="+mn-ea"/>
                           <a:cs typeface="+mn-cs"/>
                         </a:rPr>
-                        <a:t>1.65</a:t>
+                        <a:t>1,65</a:t>
                       </a:r>
                     </a:p>
                   </a:txBody>
@@ -12170,7 +12170,7 @@
                           <a:ea typeface="+mn-ea"/>
                           <a:cs typeface="+mn-cs"/>
                         </a:rPr>
-                        <a:t>0.112</a:t>
+                        <a:t>0,112</a:t>
                       </a:r>
                     </a:p>
                   </a:txBody>
@@ -12253,7 +12253,7 @@
                           <a:ea typeface="+mn-ea"/>
                           <a:cs typeface="+mn-cs"/>
                         </a:rPr>
-                        <a:t>3.66</a:t>
+                        <a:t>3,66</a:t>
                       </a:r>
                     </a:p>
                   </a:txBody>
@@ -12343,7 +12343,7 @@
                           <a:ea typeface="+mn-ea"/>
                           <a:cs typeface="+mn-cs"/>
                         </a:rPr>
-                        <a:t>1.302</a:t>
+                        <a:t>1,302</a:t>
                       </a:r>
                     </a:p>
                   </a:txBody>
@@ -12426,7 +12426,7 @@
                           <a:ea typeface="+mn-ea"/>
                           <a:cs typeface="+mn-cs"/>
                         </a:rPr>
-                        <a:t>6.72</a:t>
+                        <a:t>6,72</a:t>
                       </a:r>
                     </a:p>
                   </a:txBody>
@@ -12509,7 +12509,7 @@
                           <a:ea typeface="+mn-ea"/>
                           <a:cs typeface="+mn-cs"/>
                         </a:rPr>
-                        <a:t>1.56</a:t>
+                        <a:t>1,56</a:t>
                       </a:r>
                     </a:p>
                   </a:txBody>
@@ -12592,7 +12592,7 @@
                           <a:ea typeface="+mn-ea"/>
                           <a:cs typeface="+mn-cs"/>
                         </a:rPr>
-                        <a:t>1.575</a:t>
+                        <a:t>1,575</a:t>
                       </a:r>
                     </a:p>
                   </a:txBody>
@@ -12675,7 +12675,7 @@
                           <a:ea typeface="+mn-ea"/>
                           <a:cs typeface="+mn-cs"/>
                         </a:rPr>
-                        <a:t>1.653</a:t>
+                        <a:t>1,653</a:t>
                       </a:r>
                     </a:p>
                   </a:txBody>
@@ -12765,7 +12765,7 @@
                           <a:ea typeface="+mn-ea"/>
                           <a:cs typeface="+mn-cs"/>
                         </a:rPr>
-                        <a:t>0.68</a:t>
+                        <a:t>0,68</a:t>
                       </a:r>
                     </a:p>
                   </a:txBody>
@@ -12848,7 +12848,7 @@
                           <a:ea typeface="+mn-ea"/>
                           <a:cs typeface="+mn-cs"/>
                         </a:rPr>
-                        <a:t>3.08</a:t>
+                        <a:t>3,08</a:t>
                       </a:r>
                     </a:p>
                   </a:txBody>
@@ -12931,7 +12931,7 @@
                           <a:ea typeface="+mn-ea"/>
                           <a:cs typeface="+mn-cs"/>
                         </a:rPr>
-                        <a:t>6.63</a:t>
+                        <a:t>6,63</a:t>
                       </a:r>
                     </a:p>
                   </a:txBody>
@@ -13014,7 +13014,7 @@
                           <a:ea typeface="+mn-ea"/>
                           <a:cs typeface="+mn-cs"/>
                         </a:rPr>
-                        <a:t>2.72</a:t>
+                        <a:t>2,72</a:t>
                       </a:r>
                     </a:p>
                   </a:txBody>
@@ -13097,7 +13097,7 @@
                           <a:ea typeface="+mn-ea"/>
                           <a:cs typeface="+mn-cs"/>
                         </a:rPr>
-                        <a:t>5.25</a:t>
+                        <a:t>5,25</a:t>
                       </a:r>
                     </a:p>
                   </a:txBody>
@@ -13187,7 +13187,7 @@
                           <a:ea typeface="+mn-ea"/>
                           <a:cs typeface="+mn-cs"/>
                         </a:rPr>
-                        <a:t>0.296</a:t>
+                        <a:t>0,296</a:t>
                       </a:r>
                     </a:p>
                   </a:txBody>
@@ -13270,7 +13270,7 @@
                           <a:ea typeface="+mn-ea"/>
                           <a:cs typeface="+mn-cs"/>
                         </a:rPr>
-                        <a:t>0.58</a:t>
+                        <a:t>0,58</a:t>
                       </a:r>
                     </a:p>
                   </a:txBody>
@@ -13353,7 +13353,7 @@
                           <a:ea typeface="+mn-ea"/>
                           <a:cs typeface="+mn-cs"/>
                         </a:rPr>
-                        <a:t>0.235</a:t>
+                        <a:t>0,235</a:t>
                       </a:r>
                     </a:p>
                   </a:txBody>
@@ -13436,7 +13436,7 @@
                           <a:ea typeface="+mn-ea"/>
                           <a:cs typeface="+mn-cs"/>
                         </a:rPr>
-                        <a:t>10.25</a:t>
+                        <a:t>10,25</a:t>
                       </a:r>
                     </a:p>
                   </a:txBody>
@@ -13519,7 +13519,7 @@
                           <a:ea typeface="+mn-ea"/>
                           <a:cs typeface="+mn-cs"/>
                         </a:rPr>
-                        <a:t>0.2016</a:t>
+                        <a:t>0,2016</a:t>
                       </a:r>
                     </a:p>
                   </a:txBody>
@@ -13650,7 +13650,7 @@
                           </a:solidFill>
                           <a:latin typeface="Bahnschrift" panose="020B0502040204020203" pitchFamily="34" charset="0"/>
                         </a:rPr>
-                        <a:t>0.52 × 1.4</a:t>
+                        <a:t>0,52 × 1,4</a:t>
                       </a:r>
                     </a:p>
                   </a:txBody>
@@ -13717,7 +13717,7 @@
                           </a:solidFill>
                           <a:latin typeface="Bahnschrift" panose="020B0502040204020203" pitchFamily="34" charset="0"/>
                         </a:rPr>
-                        <a:t>2.5 × 4.1</a:t>
+                        <a:t>2,5 × 4,1</a:t>
                       </a:r>
                     </a:p>
                   </a:txBody>
@@ -13784,7 +13784,7 @@
                           </a:solidFill>
                           <a:latin typeface="Bahnschrift" panose="020B0502040204020203" pitchFamily="34" charset="0"/>
                         </a:rPr>
-                        <a:t>14.5 × 0.4</a:t>
+                        <a:t>14,5 × 0,4</a:t>
                       </a:r>
                     </a:p>
                   </a:txBody>
@@ -13851,7 +13851,7 @@
                           </a:solidFill>
                           <a:latin typeface="Bahnschrift" panose="020B0502040204020203" pitchFamily="34" charset="0"/>
                         </a:rPr>
-                        <a:t>0.37 × 0.8</a:t>
+                        <a:t>0,37 × 0,8</a:t>
                       </a:r>
                     </a:p>
                   </a:txBody>
@@ -13918,7 +13918,7 @@
                           </a:solidFill>
                           <a:latin typeface="Bahnschrift" panose="020B0502040204020203" pitchFamily="34" charset="0"/>
                         </a:rPr>
-                        <a:t>15.6 × 0.1</a:t>
+                        <a:t>15,6 × 0,1</a:t>
                       </a:r>
                     </a:p>
                   </a:txBody>
@@ -13992,7 +13992,7 @@
                           </a:solidFill>
                           <a:latin typeface="Bahnschrift" panose="020B0502040204020203" pitchFamily="34" charset="0"/>
                         </a:rPr>
-                        <a:t>12.2 × 0.3</a:t>
+                        <a:t>12,2 × 0,3</a:t>
                       </a:r>
                     </a:p>
                   </a:txBody>
@@ -14059,7 +14059,7 @@
                           </a:solidFill>
                           <a:latin typeface="Bahnschrift" panose="020B0502040204020203" pitchFamily="34" charset="0"/>
                         </a:rPr>
-                        <a:t>0.8 × 0.81</a:t>
+                        <a:t>0,8 × 0,81</a:t>
                       </a:r>
                     </a:p>
                   </a:txBody>
@@ -14126,7 +14126,7 @@
                           </a:solidFill>
                           <a:latin typeface="Bahnschrift" panose="020B0502040204020203" pitchFamily="34" charset="0"/>
                         </a:rPr>
-                        <a:t>1.4 × 2.2</a:t>
+                        <a:t>1,4 × 2,2</a:t>
                       </a:r>
                     </a:p>
                   </a:txBody>
@@ -14193,7 +14193,7 @@
                           </a:solidFill>
                           <a:latin typeface="Bahnschrift" panose="020B0502040204020203" pitchFamily="34" charset="0"/>
                         </a:rPr>
-                        <a:t>13.6 × 0.2</a:t>
+                        <a:t>13,6 × 0,2</a:t>
                       </a:r>
                     </a:p>
                   </a:txBody>
@@ -14260,7 +14260,7 @@
                           </a:solidFill>
                           <a:latin typeface="Bahnschrift" panose="020B0502040204020203" pitchFamily="34" charset="0"/>
                         </a:rPr>
-                        <a:t>0.62 × 2.1</a:t>
+                        <a:t>0,62 × 2,1</a:t>
                       </a:r>
                     </a:p>
                   </a:txBody>
@@ -14334,7 +14334,7 @@
                           </a:solidFill>
                           <a:latin typeface="Bahnschrift" panose="020B0502040204020203" pitchFamily="34" charset="0"/>
                         </a:rPr>
-                        <a:t>0.16 × 0.7</a:t>
+                        <a:t>0,16 × 0,7</a:t>
                       </a:r>
                     </a:p>
                   </a:txBody>
@@ -14401,7 +14401,7 @@
                           </a:solidFill>
                           <a:latin typeface="Bahnschrift" panose="020B0502040204020203" pitchFamily="34" charset="0"/>
                         </a:rPr>
-                        <a:t>0.61 × 4.8</a:t>
+                        <a:t>0,61 × 4,8</a:t>
                       </a:r>
                     </a:p>
                   </a:txBody>
@@ -14468,7 +14468,7 @@
                           </a:solidFill>
                           <a:latin typeface="Bahnschrift" panose="020B0502040204020203" pitchFamily="34" charset="0"/>
                         </a:rPr>
-                        <a:t>0.5 × 0.47</a:t>
+                        <a:t>0,5 × 0,47</a:t>
                       </a:r>
                     </a:p>
                   </a:txBody>
@@ -14535,7 +14535,7 @@
                           </a:solidFill>
                           <a:latin typeface="Bahnschrift" panose="020B0502040204020203" pitchFamily="34" charset="0"/>
                         </a:rPr>
-                        <a:t>0.87 × 1.9</a:t>
+                        <a:t>0,87 × 1,9</a:t>
                       </a:r>
                     </a:p>
                   </a:txBody>
@@ -14602,7 +14602,7 @@
                           </a:solidFill>
                           <a:latin typeface="Bahnschrift" panose="020B0502040204020203" pitchFamily="34" charset="0"/>
                         </a:rPr>
-                        <a:t>5.1 × 1.3</a:t>
+                        <a:t>5,1 × 1,3</a:t>
                       </a:r>
                     </a:p>
                   </a:txBody>
@@ -14676,7 +14676,7 @@
                           </a:solidFill>
                           <a:latin typeface="Bahnschrift" panose="020B0502040204020203" pitchFamily="34" charset="0"/>
                         </a:rPr>
-                        <a:t>10.5 × 0.5</a:t>
+                        <a:t>10,5 × 0,5</a:t>
                       </a:r>
                     </a:p>
                   </a:txBody>
@@ -14743,7 +14743,7 @@
                           </a:solidFill>
                           <a:latin typeface="Bahnschrift" panose="020B0502040204020203" pitchFamily="34" charset="0"/>
                         </a:rPr>
-                        <a:t>6.2 × 3.7</a:t>
+                        <a:t>6,2 × 3,7</a:t>
                       </a:r>
                     </a:p>
                   </a:txBody>
@@ -14810,7 +14810,7 @@
                           </a:solidFill>
                           <a:latin typeface="Bahnschrift" panose="020B0502040204020203" pitchFamily="34" charset="0"/>
                         </a:rPr>
-                        <a:t>0.45 × 3.5</a:t>
+                        <a:t>0,45 × 3,5</a:t>
                       </a:r>
                     </a:p>
                   </a:txBody>
@@ -14877,7 +14877,7 @@
                           </a:solidFill>
                           <a:latin typeface="Bahnschrift" panose="020B0502040204020203" pitchFamily="34" charset="0"/>
                         </a:rPr>
-                        <a:t>2.4 × 2.8</a:t>
+                        <a:t>2,4 × 2,8</a:t>
                       </a:r>
                     </a:p>
                   </a:txBody>
@@ -14944,7 +14944,7 @@
                           </a:solidFill>
                           <a:latin typeface="Bahnschrift" panose="020B0502040204020203" pitchFamily="34" charset="0"/>
                         </a:rPr>
-                        <a:t>0.96 × 0.21</a:t>
+                        <a:t>0,96 × 0,21</a:t>
                       </a:r>
                     </a:p>
                   </a:txBody>
@@ -15376,7 +15376,7 @@
                           <a:ea typeface="+mn-ea"/>
                           <a:cs typeface="+mn-cs"/>
                         </a:rPr>
-                        <a:t>2.928</a:t>
+                        <a:t>2,928</a:t>
                       </a:r>
                     </a:p>
                   </a:txBody>
@@ -15459,7 +15459,7 @@
                           <a:ea typeface="+mn-ea"/>
                           <a:cs typeface="+mn-cs"/>
                         </a:rPr>
-                        <a:t>22.94</a:t>
+                        <a:t>22,94</a:t>
                       </a:r>
                     </a:p>
                   </a:txBody>
@@ -15542,7 +15542,7 @@
                           <a:ea typeface="+mn-ea"/>
                           <a:cs typeface="+mn-cs"/>
                         </a:rPr>
-                        <a:t>0.648</a:t>
+                        <a:t>0,648</a:t>
                       </a:r>
                     </a:p>
                   </a:txBody>
@@ -15625,7 +15625,7 @@
                           <a:ea typeface="+mn-ea"/>
                           <a:cs typeface="+mn-cs"/>
                         </a:rPr>
-                        <a:t>3.12</a:t>
+                        <a:t>3,12</a:t>
                       </a:r>
                     </a:p>
                   </a:txBody>
@@ -15708,7 +15708,7 @@
                           <a:ea typeface="+mn-ea"/>
                           <a:cs typeface="+mn-cs"/>
                         </a:rPr>
-                        <a:t>5.8</a:t>
+                        <a:t>5,8</a:t>
                       </a:r>
                     </a:p>
                   </a:txBody>
@@ -15798,7 +15798,7 @@
                           <a:ea typeface="+mn-ea"/>
                           <a:cs typeface="+mn-cs"/>
                         </a:rPr>
-                        <a:t>4.4</a:t>
+                        <a:t>4,4</a:t>
                       </a:r>
                     </a:p>
                   </a:txBody>
@@ -15881,7 +15881,7 @@
                           <a:ea typeface="+mn-ea"/>
                           <a:cs typeface="+mn-cs"/>
                         </a:rPr>
-                        <a:t>0.728</a:t>
+                        <a:t>0,728</a:t>
                       </a:r>
                     </a:p>
                   </a:txBody>
@@ -15964,7 +15964,7 @@
                           <a:ea typeface="+mn-ea"/>
                           <a:cs typeface="+mn-cs"/>
                         </a:rPr>
-                        <a:t>1.65</a:t>
+                        <a:t>1,65</a:t>
                       </a:r>
                     </a:p>
                   </a:txBody>
@@ -16047,7 +16047,7 @@
                           <a:ea typeface="+mn-ea"/>
                           <a:cs typeface="+mn-cs"/>
                         </a:rPr>
-                        <a:t>0.112</a:t>
+                        <a:t>0,112</a:t>
                       </a:r>
                     </a:p>
                   </a:txBody>
@@ -16130,7 +16130,7 @@
                           <a:ea typeface="+mn-ea"/>
                           <a:cs typeface="+mn-cs"/>
                         </a:rPr>
-                        <a:t>3.66</a:t>
+                        <a:t>3,66</a:t>
                       </a:r>
                     </a:p>
                   </a:txBody>
@@ -16220,7 +16220,7 @@
                           <a:ea typeface="+mn-ea"/>
                           <a:cs typeface="+mn-cs"/>
                         </a:rPr>
-                        <a:t>1.302</a:t>
+                        <a:t>1,302</a:t>
                       </a:r>
                     </a:p>
                   </a:txBody>
@@ -16303,7 +16303,7 @@
                           <a:ea typeface="+mn-ea"/>
                           <a:cs typeface="+mn-cs"/>
                         </a:rPr>
-                        <a:t>6.72</a:t>
+                        <a:t>6,72</a:t>
                       </a:r>
                     </a:p>
                   </a:txBody>
@@ -16386,7 +16386,7 @@
                           <a:ea typeface="+mn-ea"/>
                           <a:cs typeface="+mn-cs"/>
                         </a:rPr>
-                        <a:t>1.56</a:t>
+                        <a:t>1,56</a:t>
                       </a:r>
                     </a:p>
                   </a:txBody>
@@ -16469,7 +16469,7 @@
                           <a:ea typeface="+mn-ea"/>
                           <a:cs typeface="+mn-cs"/>
                         </a:rPr>
-                        <a:t>1.575</a:t>
+                        <a:t>1,575</a:t>
                       </a:r>
                     </a:p>
                   </a:txBody>
@@ -16552,7 +16552,7 @@
                           <a:ea typeface="+mn-ea"/>
                           <a:cs typeface="+mn-cs"/>
                         </a:rPr>
-                        <a:t>1.653</a:t>
+                        <a:t>1,653</a:t>
                       </a:r>
                     </a:p>
                   </a:txBody>
@@ -16642,7 +16642,7 @@
                           <a:ea typeface="+mn-ea"/>
                           <a:cs typeface="+mn-cs"/>
                         </a:rPr>
-                        <a:t>0.68</a:t>
+                        <a:t>0,68</a:t>
                       </a:r>
                     </a:p>
                   </a:txBody>
@@ -16725,7 +16725,7 @@
                           <a:ea typeface="+mn-ea"/>
                           <a:cs typeface="+mn-cs"/>
                         </a:rPr>
-                        <a:t>3.08</a:t>
+                        <a:t>3,08</a:t>
                       </a:r>
                     </a:p>
                   </a:txBody>
@@ -16808,7 +16808,7 @@
                           <a:ea typeface="+mn-ea"/>
                           <a:cs typeface="+mn-cs"/>
                         </a:rPr>
-                        <a:t>6.63</a:t>
+                        <a:t>6,63</a:t>
                       </a:r>
                     </a:p>
                   </a:txBody>
@@ -16891,7 +16891,7 @@
                           <a:ea typeface="+mn-ea"/>
                           <a:cs typeface="+mn-cs"/>
                         </a:rPr>
-                        <a:t>2.72</a:t>
+                        <a:t>2,72</a:t>
                       </a:r>
                     </a:p>
                   </a:txBody>
@@ -16974,7 +16974,7 @@
                           <a:ea typeface="+mn-ea"/>
                           <a:cs typeface="+mn-cs"/>
                         </a:rPr>
-                        <a:t>5.25</a:t>
+                        <a:t>5,25</a:t>
                       </a:r>
                     </a:p>
                   </a:txBody>
@@ -17064,7 +17064,7 @@
                           <a:ea typeface="+mn-ea"/>
                           <a:cs typeface="+mn-cs"/>
                         </a:rPr>
-                        <a:t>0.296</a:t>
+                        <a:t>0,296</a:t>
                       </a:r>
                     </a:p>
                   </a:txBody>
@@ -17147,7 +17147,7 @@
                           <a:ea typeface="+mn-ea"/>
                           <a:cs typeface="+mn-cs"/>
                         </a:rPr>
-                        <a:t>0.58</a:t>
+                        <a:t>0,58</a:t>
                       </a:r>
                     </a:p>
                   </a:txBody>
@@ -17230,7 +17230,7 @@
                           <a:ea typeface="+mn-ea"/>
                           <a:cs typeface="+mn-cs"/>
                         </a:rPr>
-                        <a:t>0.235</a:t>
+                        <a:t>0,235</a:t>
                       </a:r>
                     </a:p>
                   </a:txBody>
@@ -17313,7 +17313,7 @@
                           <a:ea typeface="+mn-ea"/>
                           <a:cs typeface="+mn-cs"/>
                         </a:rPr>
-                        <a:t>10.25</a:t>
+                        <a:t>10,25</a:t>
                       </a:r>
                     </a:p>
                   </a:txBody>
@@ -17396,7 +17396,7 @@
                           <a:ea typeface="+mn-ea"/>
                           <a:cs typeface="+mn-cs"/>
                         </a:rPr>
-                        <a:t>0.2016</a:t>
+                        <a:t>0,2016</a:t>
                       </a:r>
                     </a:p>
                   </a:txBody>
@@ -17533,7 +17533,7 @@
                           </a:solidFill>
                           <a:latin typeface="Bahnschrift" panose="020B0502040204020203" pitchFamily="34" charset="0"/>
                         </a:rPr>
-                        <a:t>0.52 × 1.4</a:t>
+                        <a:t>0,52 × 1,4</a:t>
                       </a:r>
                     </a:p>
                   </a:txBody>
@@ -17600,7 +17600,7 @@
                           </a:solidFill>
                           <a:latin typeface="Bahnschrift" panose="020B0502040204020203" pitchFamily="34" charset="0"/>
                         </a:rPr>
-                        <a:t>2.5 × 4.1</a:t>
+                        <a:t>2,5 × 4,1</a:t>
                       </a:r>
                     </a:p>
                   </a:txBody>
@@ -17667,7 +17667,7 @@
                           </a:solidFill>
                           <a:latin typeface="Bahnschrift" panose="020B0502040204020203" pitchFamily="34" charset="0"/>
                         </a:rPr>
-                        <a:t>14.5 × 0.4</a:t>
+                        <a:t>14,5 × 0,4</a:t>
                       </a:r>
                     </a:p>
                   </a:txBody>
@@ -17734,7 +17734,7 @@
                           </a:solidFill>
                           <a:latin typeface="Bahnschrift" panose="020B0502040204020203" pitchFamily="34" charset="0"/>
                         </a:rPr>
-                        <a:t>0.37 × 0.8</a:t>
+                        <a:t>0,37 × 0,8</a:t>
                       </a:r>
                     </a:p>
                   </a:txBody>
@@ -17801,7 +17801,7 @@
                           </a:solidFill>
                           <a:latin typeface="Bahnschrift" panose="020B0502040204020203" pitchFamily="34" charset="0"/>
                         </a:rPr>
-                        <a:t>15.6 × 0.1</a:t>
+                        <a:t>15,6 × 0,1</a:t>
                       </a:r>
                     </a:p>
                   </a:txBody>
@@ -17875,7 +17875,7 @@
                           </a:solidFill>
                           <a:latin typeface="Bahnschrift" panose="020B0502040204020203" pitchFamily="34" charset="0"/>
                         </a:rPr>
-                        <a:t>12.2 × 0.3</a:t>
+                        <a:t>12,2 × 0,3</a:t>
                       </a:r>
                     </a:p>
                   </a:txBody>
@@ -17942,7 +17942,7 @@
                           </a:solidFill>
                           <a:latin typeface="Bahnschrift" panose="020B0502040204020203" pitchFamily="34" charset="0"/>
                         </a:rPr>
-                        <a:t>0.8 × 0.81</a:t>
+                        <a:t>0,8 × 0,81</a:t>
                       </a:r>
                     </a:p>
                   </a:txBody>
@@ -18009,7 +18009,7 @@
                           </a:solidFill>
                           <a:latin typeface="Bahnschrift" panose="020B0502040204020203" pitchFamily="34" charset="0"/>
                         </a:rPr>
-                        <a:t>1.4 × 2.2</a:t>
+                        <a:t>1,4 × 2,2</a:t>
                       </a:r>
                     </a:p>
                   </a:txBody>
@@ -18076,7 +18076,7 @@
                           </a:solidFill>
                           <a:latin typeface="Bahnschrift" panose="020B0502040204020203" pitchFamily="34" charset="0"/>
                         </a:rPr>
-                        <a:t>13.6 × 0.2</a:t>
+                        <a:t>13,6 × 0,2</a:t>
                       </a:r>
                     </a:p>
                   </a:txBody>
@@ -18143,7 +18143,7 @@
                           </a:solidFill>
                           <a:latin typeface="Bahnschrift" panose="020B0502040204020203" pitchFamily="34" charset="0"/>
                         </a:rPr>
-                        <a:t>0.62 × 2.1</a:t>
+                        <a:t>0,62 × 2,1</a:t>
                       </a:r>
                     </a:p>
                   </a:txBody>
@@ -18217,7 +18217,7 @@
                           </a:solidFill>
                           <a:latin typeface="Bahnschrift" panose="020B0502040204020203" pitchFamily="34" charset="0"/>
                         </a:rPr>
-                        <a:t>0.16 × 0.7</a:t>
+                        <a:t>0,16 × 0,7</a:t>
                       </a:r>
                     </a:p>
                   </a:txBody>
@@ -18284,7 +18284,7 @@
                           </a:solidFill>
                           <a:latin typeface="Bahnschrift" panose="020B0502040204020203" pitchFamily="34" charset="0"/>
                         </a:rPr>
-                        <a:t>0.61 × 4.8</a:t>
+                        <a:t>0,61 × 4,8</a:t>
                       </a:r>
                     </a:p>
                   </a:txBody>
@@ -18351,7 +18351,7 @@
                           </a:solidFill>
                           <a:latin typeface="Bahnschrift" panose="020B0502040204020203" pitchFamily="34" charset="0"/>
                         </a:rPr>
-                        <a:t>0.5 × 0.47</a:t>
+                        <a:t>0,5 × 0,47</a:t>
                       </a:r>
                     </a:p>
                   </a:txBody>
@@ -18418,7 +18418,7 @@
                           </a:solidFill>
                           <a:latin typeface="Bahnschrift" panose="020B0502040204020203" pitchFamily="34" charset="0"/>
                         </a:rPr>
-                        <a:t>0.87 × 1.9</a:t>
+                        <a:t>0,87 × 1,9</a:t>
                       </a:r>
                     </a:p>
                   </a:txBody>
@@ -18485,7 +18485,7 @@
                           </a:solidFill>
                           <a:latin typeface="Bahnschrift" panose="020B0502040204020203" pitchFamily="34" charset="0"/>
                         </a:rPr>
-                        <a:t>5.1 × 1.3</a:t>
+                        <a:t>5,1 × 1,3</a:t>
                       </a:r>
                     </a:p>
                   </a:txBody>
@@ -18559,7 +18559,7 @@
                           </a:solidFill>
                           <a:latin typeface="Bahnschrift" panose="020B0502040204020203" pitchFamily="34" charset="0"/>
                         </a:rPr>
-                        <a:t>10.5 × 0.5</a:t>
+                        <a:t>10,5 × 0,5</a:t>
                       </a:r>
                     </a:p>
                   </a:txBody>
@@ -18626,7 +18626,7 @@
                           </a:solidFill>
                           <a:latin typeface="Bahnschrift" panose="020B0502040204020203" pitchFamily="34" charset="0"/>
                         </a:rPr>
-                        <a:t>6.2 × 3.7</a:t>
+                        <a:t>6,2 × 3,7</a:t>
                       </a:r>
                     </a:p>
                   </a:txBody>
@@ -18693,7 +18693,7 @@
                           </a:solidFill>
                           <a:latin typeface="Bahnschrift" panose="020B0502040204020203" pitchFamily="34" charset="0"/>
                         </a:rPr>
-                        <a:t>0.45 × 3.5</a:t>
+                        <a:t>0,45 × 3,5</a:t>
                       </a:r>
                     </a:p>
                   </a:txBody>
@@ -18760,7 +18760,7 @@
                           </a:solidFill>
                           <a:latin typeface="Bahnschrift" panose="020B0502040204020203" pitchFamily="34" charset="0"/>
                         </a:rPr>
-                        <a:t>2.4 × 2.8</a:t>
+                        <a:t>2,4 × 2,8</a:t>
                       </a:r>
                     </a:p>
                   </a:txBody>
@@ -18827,7 +18827,7 @@
                           </a:solidFill>
                           <a:latin typeface="Bahnschrift" panose="020B0502040204020203" pitchFamily="34" charset="0"/>
                         </a:rPr>
-                        <a:t>0.96 × 0.21</a:t>
+                        <a:t>0,96 × 0,21</a:t>
                       </a:r>
                     </a:p>
                   </a:txBody>
@@ -19289,7 +19289,7 @@
                           <a:ea typeface="+mn-ea"/>
                           <a:cs typeface="+mn-cs"/>
                         </a:rPr>
-                        <a:t>2.928</a:t>
+                        <a:t>2,928</a:t>
                       </a:r>
                     </a:p>
                   </a:txBody>
@@ -19372,7 +19372,7 @@
                           <a:ea typeface="+mn-ea"/>
                           <a:cs typeface="+mn-cs"/>
                         </a:rPr>
-                        <a:t>22.94</a:t>
+                        <a:t>22,94</a:t>
                       </a:r>
                     </a:p>
                   </a:txBody>
@@ -19455,7 +19455,7 @@
                           <a:ea typeface="+mn-ea"/>
                           <a:cs typeface="+mn-cs"/>
                         </a:rPr>
-                        <a:t>0.648</a:t>
+                        <a:t>0,648</a:t>
                       </a:r>
                     </a:p>
                   </a:txBody>
@@ -19538,7 +19538,7 @@
                           <a:ea typeface="+mn-ea"/>
                           <a:cs typeface="+mn-cs"/>
                         </a:rPr>
-                        <a:t>3.12</a:t>
+                        <a:t>3,12</a:t>
                       </a:r>
                     </a:p>
                   </a:txBody>
@@ -19624,7 +19624,7 @@
                           <a:ea typeface="+mn-ea"/>
                           <a:cs typeface="+mn-cs"/>
                         </a:rPr>
-                        <a:t>5.8</a:t>
+                        <a:t>5,8</a:t>
                       </a:r>
                     </a:p>
                   </a:txBody>
@@ -19714,7 +19714,7 @@
                           <a:ea typeface="+mn-ea"/>
                           <a:cs typeface="+mn-cs"/>
                         </a:rPr>
-                        <a:t>4.4</a:t>
+                        <a:t>4,4</a:t>
                       </a:r>
                     </a:p>
                   </a:txBody>
@@ -19800,7 +19800,7 @@
                           <a:ea typeface="+mn-ea"/>
                           <a:cs typeface="+mn-cs"/>
                         </a:rPr>
-                        <a:t>0.728</a:t>
+                        <a:t>0,728</a:t>
                       </a:r>
                     </a:p>
                   </a:txBody>
@@ -19883,7 +19883,7 @@
                           <a:ea typeface="+mn-ea"/>
                           <a:cs typeface="+mn-cs"/>
                         </a:rPr>
-                        <a:t>1.65</a:t>
+                        <a:t>1,65</a:t>
                       </a:r>
                     </a:p>
                   </a:txBody>
@@ -19969,7 +19969,7 @@
                           <a:ea typeface="+mn-ea"/>
                           <a:cs typeface="+mn-cs"/>
                         </a:rPr>
-                        <a:t>0.112</a:t>
+                        <a:t>0,112</a:t>
                       </a:r>
                     </a:p>
                   </a:txBody>
@@ -20052,7 +20052,7 @@
                           <a:ea typeface="+mn-ea"/>
                           <a:cs typeface="+mn-cs"/>
                         </a:rPr>
-                        <a:t>3.66</a:t>
+                        <a:t>3,66</a:t>
                       </a:r>
                     </a:p>
                   </a:txBody>
@@ -20142,7 +20142,7 @@
                           <a:ea typeface="+mn-ea"/>
                           <a:cs typeface="+mn-cs"/>
                         </a:rPr>
-                        <a:t>1.302</a:t>
+                        <a:t>1,302</a:t>
                       </a:r>
                     </a:p>
                   </a:txBody>
@@ -20225,7 +20225,7 @@
                           <a:ea typeface="+mn-ea"/>
                           <a:cs typeface="+mn-cs"/>
                         </a:rPr>
-                        <a:t>6.72</a:t>
+                        <a:t>6,72</a:t>
                       </a:r>
                     </a:p>
                   </a:txBody>
@@ -20308,7 +20308,7 @@
                           <a:ea typeface="+mn-ea"/>
                           <a:cs typeface="+mn-cs"/>
                         </a:rPr>
-                        <a:t>1.56</a:t>
+                        <a:t>1,56</a:t>
                       </a:r>
                     </a:p>
                   </a:txBody>
@@ -20391,7 +20391,7 @@
                           <a:ea typeface="+mn-ea"/>
                           <a:cs typeface="+mn-cs"/>
                         </a:rPr>
-                        <a:t>1.575</a:t>
+                        <a:t>1,575</a:t>
                       </a:r>
                     </a:p>
                   </a:txBody>
@@ -20474,7 +20474,7 @@
                           <a:ea typeface="+mn-ea"/>
                           <a:cs typeface="+mn-cs"/>
                         </a:rPr>
-                        <a:t>1.653</a:t>
+                        <a:t>1,653</a:t>
                       </a:r>
                     </a:p>
                   </a:txBody>
@@ -20564,7 +20564,7 @@
                           <a:ea typeface="+mn-ea"/>
                           <a:cs typeface="+mn-cs"/>
                         </a:rPr>
-                        <a:t>0.68</a:t>
+                        <a:t>0,68</a:t>
                       </a:r>
                     </a:p>
                   </a:txBody>
@@ -20650,7 +20650,7 @@
                           <a:ea typeface="+mn-ea"/>
                           <a:cs typeface="+mn-cs"/>
                         </a:rPr>
-                        <a:t>3.08</a:t>
+                        <a:t>3,08</a:t>
                       </a:r>
                     </a:p>
                   </a:txBody>
@@ -20733,7 +20733,7 @@
                           <a:ea typeface="+mn-ea"/>
                           <a:cs typeface="+mn-cs"/>
                         </a:rPr>
-                        <a:t>6.63</a:t>
+                        <a:t>6,63</a:t>
                       </a:r>
                     </a:p>
                   </a:txBody>
@@ -20816,7 +20816,7 @@
                           <a:ea typeface="+mn-ea"/>
                           <a:cs typeface="+mn-cs"/>
                         </a:rPr>
-                        <a:t>2.72</a:t>
+                        <a:t>2,72</a:t>
                       </a:r>
                     </a:p>
                   </a:txBody>
@@ -20899,7 +20899,7 @@
                           <a:ea typeface="+mn-ea"/>
                           <a:cs typeface="+mn-cs"/>
                         </a:rPr>
-                        <a:t>5.25</a:t>
+                        <a:t>5,25</a:t>
                       </a:r>
                     </a:p>
                   </a:txBody>
@@ -20989,7 +20989,7 @@
                           <a:ea typeface="+mn-ea"/>
                           <a:cs typeface="+mn-cs"/>
                         </a:rPr>
-                        <a:t>0.296</a:t>
+                        <a:t>0,296</a:t>
                       </a:r>
                     </a:p>
                   </a:txBody>
@@ -21072,7 +21072,7 @@
                           <a:ea typeface="+mn-ea"/>
                           <a:cs typeface="+mn-cs"/>
                         </a:rPr>
-                        <a:t>0.58</a:t>
+                        <a:t>0,58</a:t>
                       </a:r>
                     </a:p>
                   </a:txBody>
@@ -21158,7 +21158,7 @@
                           <a:ea typeface="+mn-ea"/>
                           <a:cs typeface="+mn-cs"/>
                         </a:rPr>
-                        <a:t>0.235</a:t>
+                        <a:t>0,235</a:t>
                       </a:r>
                     </a:p>
                   </a:txBody>
@@ -21241,7 +21241,7 @@
                           <a:ea typeface="+mn-ea"/>
                           <a:cs typeface="+mn-cs"/>
                         </a:rPr>
-                        <a:t>10.25</a:t>
+                        <a:t>10,25</a:t>
                       </a:r>
                     </a:p>
                   </a:txBody>
@@ -21324,7 +21324,7 @@
                           <a:ea typeface="+mn-ea"/>
                           <a:cs typeface="+mn-cs"/>
                         </a:rPr>
-                        <a:t>0.2016</a:t>
+                        <a:t>0,2016</a:t>
                       </a:r>
                     </a:p>
                   </a:txBody>
@@ -21461,7 +21461,7 @@
                           </a:solidFill>
                           <a:latin typeface="Bahnschrift" panose="020B0502040204020203" pitchFamily="34" charset="0"/>
                         </a:rPr>
-                        <a:t>0.52 × 1.4</a:t>
+                        <a:t>0,52 × 1,4</a:t>
                       </a:r>
                     </a:p>
                   </a:txBody>
@@ -21528,7 +21528,7 @@
                           </a:solidFill>
                           <a:latin typeface="Bahnschrift" panose="020B0502040204020203" pitchFamily="34" charset="0"/>
                         </a:rPr>
-                        <a:t>2.5 × 4.1</a:t>
+                        <a:t>2,5 × 4,1</a:t>
                       </a:r>
                     </a:p>
                   </a:txBody>
@@ -21595,7 +21595,7 @@
                           </a:solidFill>
                           <a:latin typeface="Bahnschrift" panose="020B0502040204020203" pitchFamily="34" charset="0"/>
                         </a:rPr>
-                        <a:t>14.5 × 0.4</a:t>
+                        <a:t>14,5 × 0,4</a:t>
                       </a:r>
                     </a:p>
                   </a:txBody>
@@ -21662,7 +21662,7 @@
                           </a:solidFill>
                           <a:latin typeface="Bahnschrift" panose="020B0502040204020203" pitchFamily="34" charset="0"/>
                         </a:rPr>
-                        <a:t>0.37 × 0.8</a:t>
+                        <a:t>0,37 × 0,8</a:t>
                       </a:r>
                     </a:p>
                   </a:txBody>
@@ -21729,7 +21729,7 @@
                           </a:solidFill>
                           <a:latin typeface="Bahnschrift" panose="020B0502040204020203" pitchFamily="34" charset="0"/>
                         </a:rPr>
-                        <a:t>15.6 × 0.1</a:t>
+                        <a:t>15,6 × 0,1</a:t>
                       </a:r>
                     </a:p>
                   </a:txBody>
@@ -21803,7 +21803,7 @@
                           </a:solidFill>
                           <a:latin typeface="Bahnschrift" panose="020B0502040204020203" pitchFamily="34" charset="0"/>
                         </a:rPr>
-                        <a:t>12.2 × 0.3</a:t>
+                        <a:t>12,2 × 0,3</a:t>
                       </a:r>
                     </a:p>
                   </a:txBody>
@@ -21870,7 +21870,7 @@
                           </a:solidFill>
                           <a:latin typeface="Bahnschrift" panose="020B0502040204020203" pitchFamily="34" charset="0"/>
                         </a:rPr>
-                        <a:t>0.8 × 0.81</a:t>
+                        <a:t>0,8 × 0,81</a:t>
                       </a:r>
                     </a:p>
                   </a:txBody>
@@ -21937,7 +21937,7 @@
                           </a:solidFill>
                           <a:latin typeface="Bahnschrift" panose="020B0502040204020203" pitchFamily="34" charset="0"/>
                         </a:rPr>
-                        <a:t>1.4 × 2.2</a:t>
+                        <a:t>1,4 × 2,2</a:t>
                       </a:r>
                     </a:p>
                   </a:txBody>
@@ -22004,7 +22004,7 @@
                           </a:solidFill>
                           <a:latin typeface="Bahnschrift" panose="020B0502040204020203" pitchFamily="34" charset="0"/>
                         </a:rPr>
-                        <a:t>13.6 × 0.2</a:t>
+                        <a:t>13,6 × 0,2</a:t>
                       </a:r>
                     </a:p>
                   </a:txBody>
@@ -22071,7 +22071,7 @@
                           </a:solidFill>
                           <a:latin typeface="Bahnschrift" panose="020B0502040204020203" pitchFamily="34" charset="0"/>
                         </a:rPr>
-                        <a:t>0.62 × 2.1</a:t>
+                        <a:t>0,62 × 2,1</a:t>
                       </a:r>
                     </a:p>
                   </a:txBody>
@@ -22145,7 +22145,7 @@
                           </a:solidFill>
                           <a:latin typeface="Bahnschrift" panose="020B0502040204020203" pitchFamily="34" charset="0"/>
                         </a:rPr>
-                        <a:t>0.16 × 0.7</a:t>
+                        <a:t>0,16 × 0,7</a:t>
                       </a:r>
                     </a:p>
                   </a:txBody>
@@ -22212,7 +22212,7 @@
                           </a:solidFill>
                           <a:latin typeface="Bahnschrift" panose="020B0502040204020203" pitchFamily="34" charset="0"/>
                         </a:rPr>
-                        <a:t>0.61 × 4.8</a:t>
+                        <a:t>0,61 × 4,8</a:t>
                       </a:r>
                     </a:p>
                   </a:txBody>
@@ -22279,7 +22279,7 @@
                           </a:solidFill>
                           <a:latin typeface="Bahnschrift" panose="020B0502040204020203" pitchFamily="34" charset="0"/>
                         </a:rPr>
-                        <a:t>0.5 × 0.47</a:t>
+                        <a:t>0,5 × 0,47</a:t>
                       </a:r>
                     </a:p>
                   </a:txBody>
@@ -22346,7 +22346,7 @@
                           </a:solidFill>
                           <a:latin typeface="Bahnschrift" panose="020B0502040204020203" pitchFamily="34" charset="0"/>
                         </a:rPr>
-                        <a:t>0.87 × 1.9</a:t>
+                        <a:t>0,87 × 1,9</a:t>
                       </a:r>
                     </a:p>
                   </a:txBody>
@@ -22413,7 +22413,7 @@
                           </a:solidFill>
                           <a:latin typeface="Bahnschrift" panose="020B0502040204020203" pitchFamily="34" charset="0"/>
                         </a:rPr>
-                        <a:t>5.1 × 1.3</a:t>
+                        <a:t>5,1 × 1,3</a:t>
                       </a:r>
                     </a:p>
                   </a:txBody>
@@ -22487,7 +22487,7 @@
                           </a:solidFill>
                           <a:latin typeface="Bahnschrift" panose="020B0502040204020203" pitchFamily="34" charset="0"/>
                         </a:rPr>
-                        <a:t>10.5 × 0.5</a:t>
+                        <a:t>10,5 × 0,5</a:t>
                       </a:r>
                     </a:p>
                   </a:txBody>
@@ -22554,7 +22554,7 @@
                           </a:solidFill>
                           <a:latin typeface="Bahnschrift" panose="020B0502040204020203" pitchFamily="34" charset="0"/>
                         </a:rPr>
-                        <a:t>6.2 × 3.7</a:t>
+                        <a:t>6,2 × 3,7</a:t>
                       </a:r>
                     </a:p>
                   </a:txBody>
@@ -22621,7 +22621,7 @@
                           </a:solidFill>
                           <a:latin typeface="Bahnschrift" panose="020B0502040204020203" pitchFamily="34" charset="0"/>
                         </a:rPr>
-                        <a:t>0.45 × 3.5</a:t>
+                        <a:t>0,45 × 3,5</a:t>
                       </a:r>
                     </a:p>
                   </a:txBody>
@@ -22688,7 +22688,7 @@
                           </a:solidFill>
                           <a:latin typeface="Bahnschrift" panose="020B0502040204020203" pitchFamily="34" charset="0"/>
                         </a:rPr>
-                        <a:t>2.4 × 2.8</a:t>
+                        <a:t>2,4 × 2,8</a:t>
                       </a:r>
                     </a:p>
                   </a:txBody>
@@ -22755,7 +22755,7 @@
                           </a:solidFill>
                           <a:latin typeface="Bahnschrift" panose="020B0502040204020203" pitchFamily="34" charset="0"/>
                         </a:rPr>
-                        <a:t>0.96 × 0.21</a:t>
+                        <a:t>0,96 × 0,21</a:t>
                       </a:r>
                     </a:p>
                   </a:txBody>
@@ -22871,7 +22871,7 @@
                             <a:sysClr val="windowText" lastClr="000000"/>
                           </a:solidFill>
                         </a:rPr>
-                        <a:t>10.43</a:t>
+                        <a:t>10,43</a:t>
                       </a:r>
                     </a:p>
                   </a:txBody>
